--- a/examples/ppt/transitions/transitions-dynamic.pptx
+++ b/examples/ppt/transitions/transitions-dynamic.pptx
@@ -5,31 +5,31 @@
     <p:sldMasterId xmlns:r="http://schemas.openxmlformats.org/officeDocument/2006/relationships" id="2147483648" r:id="rId1"/>
   </p:sldMasterIdLst>
   <p:sldIdLst>
-    <p:sldId id="256" r:id="Ref513911b7c14c94"/>
-    <p:sldId id="257" r:id="R5140933f86aa479b"/>
-    <p:sldId id="258" r:id="R7a543e2f093c4fad"/>
-    <p:sldId id="259" r:id="R900fa45e75cf47db"/>
-    <p:sldId id="260" r:id="R99dd4893df4f42e3"/>
-    <p:sldId id="261" r:id="Rb154578f04ee431b"/>
-    <p:sldId id="262" r:id="Rd41b2c4ffe2947e3"/>
-    <p:sldId id="263" r:id="R39f1c0e3e1e14601"/>
-    <p:sldId id="264" r:id="R7044a777a18e48d0"/>
-    <p:sldId id="265" r:id="Rcfe042106df44c88"/>
-    <p:sldId id="266" r:id="Rcabe10f1e9dd4ad7"/>
-    <p:sldId id="267" r:id="R3a56b7cb1bc14eab"/>
-    <p:sldId id="268" r:id="R5e758e7e60c94ad2"/>
-    <p:sldId id="269" r:id="R69607190b3744174"/>
-    <p:sldId id="270" r:id="R088333624c4842ec"/>
-    <p:sldId id="271" r:id="R1b5d5d544d5142ef"/>
-    <p:sldId id="272" r:id="Rbcee5c76f9be4626"/>
-    <p:sldId id="273" r:id="Ref6b874d44bc49bb"/>
-    <p:sldId id="274" r:id="Rf7e1ca4344e94946"/>
-    <p:sldId id="275" r:id="R8035f43cb94444e4"/>
-    <p:sldId id="276" r:id="Rbde77ea162e2486f"/>
-    <p:sldId id="277" r:id="R720ae6c46c3841d5"/>
-    <p:sldId id="278" r:id="Re3854aeaeaba4c77"/>
-    <p:sldId id="279" r:id="R6512e61928f24115"/>
-    <p:sldId id="280" r:id="R0ca49df8ace5487d"/>
+    <p:sldId id="256" r:id="R1331db79eb1840f9"/>
+    <p:sldId id="257" r:id="R772f60e90200454b"/>
+    <p:sldId id="258" r:id="Re11c28ef53e1489f"/>
+    <p:sldId id="259" r:id="R568c3725de37468b"/>
+    <p:sldId id="260" r:id="Rd02186248d74410c"/>
+    <p:sldId id="261" r:id="Rc49a2ea4784d41d2"/>
+    <p:sldId id="262" r:id="R85e202e861164bc9"/>
+    <p:sldId id="263" r:id="Rad06977a6cb249b7"/>
+    <p:sldId id="264" r:id="R90cbda3b23024e30"/>
+    <p:sldId id="265" r:id="R40078d0f10314c3a"/>
+    <p:sldId id="266" r:id="R3463a69ecbcd4a41"/>
+    <p:sldId id="267" r:id="Re08c9366768e4f84"/>
+    <p:sldId id="268" r:id="Rafce27d276754c1f"/>
+    <p:sldId id="269" r:id="R08749327eb2d40ae"/>
+    <p:sldId id="270" r:id="Rcedbca15cbe64541"/>
+    <p:sldId id="271" r:id="R75f5d037120a4f9c"/>
+    <p:sldId id="272" r:id="Rb09237dcea754142"/>
+    <p:sldId id="273" r:id="R273294e311884897"/>
+    <p:sldId id="274" r:id="Rec5ad94cf1384918"/>
+    <p:sldId id="275" r:id="R75d770a4572c411d"/>
+    <p:sldId id="276" r:id="R43379ef226a64200"/>
+    <p:sldId id="277" r:id="Re61e5347e5e24d9c"/>
+    <p:sldId id="278" r:id="R5bc91098969e4b26"/>
+    <p:sldId id="279" r:id="R4a7e112713014168"/>
+    <p:sldId id="280" r:id="Rc58e14d8a4c643bf"/>
   </p:sldIdLst>
   <p:sldSz cx="12192000" cy="6858000"/>
   <p:notesSz cx="6858000" cy="9144000"/>
@@ -304,7 +304,7 @@
 </file>
 
 <file path=ppt/slideMasters/slideMaster1.xml><?xml version="1.0" encoding="utf-8"?>
-<p:sldMaster xmlns:p="http://schemas.openxmlformats.org/presentationml/2006/main">
+<p:sldMaster xmlns:r="http://schemas.openxmlformats.org/officeDocument/2006/relationships" xmlns:p="http://schemas.openxmlformats.org/presentationml/2006/main">
   <p:cSld>
     <p:spTree>
       <p:nvGrpSpPr>
@@ -338,7 +338,7 @@
       <p:grpSpPr/>
       <p:sp>
         <p:nvSpPr>
-          <p:cNvPr id="10000" name="TextBox 1"/>
+          <p:cNvPr id="100000" name="TextBox 1"/>
           <p:cNvSpPr/>
           <p:nvPr/>
         </p:nvSpPr>
@@ -357,17 +357,12 @@
         <p:txBody>
           <a:bodyPr xmlns:a="http://schemas.openxmlformats.org/drawingml/2006/main"/>
           <a:lstStyle xmlns:a="http://schemas.openxmlformats.org/drawingml/2006/main"/>
-          <a:p xmlns:a="http://schemas.openxmlformats.org/drawingml/2006/main">
-            <a:r>
-              <a:rPr lang="en-US"/>
-              <a:t/>
-            </a:r>
-          </a:p>
-        </p:txBody>
-      </p:sp>
-      <p:sp>
-        <p:nvSpPr>
-          <p:cNvPr id="10001" name="TextBox 2"/>
+          <a:p xmlns:a="http://schemas.openxmlformats.org/drawingml/2006/main"/>
+        </p:txBody>
+      </p:sp>
+      <p:sp>
+        <p:nvSpPr>
+          <p:cNvPr id="100001" name="TextBox 2"/>
           <p:cNvSpPr txBox="1"/>
           <p:nvPr/>
         </p:nvSpPr>
@@ -413,7 +408,7 @@
       <p:grpSpPr/>
       <p:sp>
         <p:nvSpPr>
-          <p:cNvPr id="10018" name="TextBox 1"/>
+          <p:cNvPr id="100018" name="TextBox 1"/>
           <p:cNvSpPr/>
           <p:nvPr/>
         </p:nvSpPr>
@@ -432,17 +427,12 @@
         <p:txBody>
           <a:bodyPr xmlns:a="http://schemas.openxmlformats.org/drawingml/2006/main"/>
           <a:lstStyle xmlns:a="http://schemas.openxmlformats.org/drawingml/2006/main"/>
-          <a:p xmlns:a="http://schemas.openxmlformats.org/drawingml/2006/main">
-            <a:r>
-              <a:rPr lang="en-US"/>
-              <a:t/>
-            </a:r>
-          </a:p>
-        </p:txBody>
-      </p:sp>
-      <p:sp>
-        <p:nvSpPr>
-          <p:cNvPr id="10019" name="TextBox 2"/>
+          <a:p xmlns:a="http://schemas.openxmlformats.org/drawingml/2006/main"/>
+        </p:txBody>
+      </p:sp>
+      <p:sp>
+        <p:nvSpPr>
+          <p:cNvPr id="100019" name="TextBox 2"/>
           <p:cNvSpPr txBox="1"/>
           <p:nvPr/>
         </p:nvSpPr>
@@ -500,7 +490,7 @@
       <p:grpSpPr/>
       <p:sp>
         <p:nvSpPr>
-          <p:cNvPr id="10020" name="TextBox 1"/>
+          <p:cNvPr id="100020" name="TextBox 1"/>
           <p:cNvSpPr/>
           <p:nvPr/>
         </p:nvSpPr>
@@ -519,17 +509,12 @@
         <p:txBody>
           <a:bodyPr xmlns:a="http://schemas.openxmlformats.org/drawingml/2006/main"/>
           <a:lstStyle xmlns:a="http://schemas.openxmlformats.org/drawingml/2006/main"/>
-          <a:p xmlns:a="http://schemas.openxmlformats.org/drawingml/2006/main">
-            <a:r>
-              <a:rPr lang="en-US"/>
-              <a:t/>
-            </a:r>
-          </a:p>
-        </p:txBody>
-      </p:sp>
-      <p:sp>
-        <p:nvSpPr>
-          <p:cNvPr id="10021" name="TextBox 2"/>
+          <a:p xmlns:a="http://schemas.openxmlformats.org/drawingml/2006/main"/>
+        </p:txBody>
+      </p:sp>
+      <p:sp>
+        <p:nvSpPr>
+          <p:cNvPr id="100021" name="TextBox 2"/>
           <p:cNvSpPr txBox="1"/>
           <p:nvPr/>
         </p:nvSpPr>
@@ -587,7 +572,7 @@
       <p:grpSpPr/>
       <p:sp>
         <p:nvSpPr>
-          <p:cNvPr id="10022" name="TextBox 1"/>
+          <p:cNvPr id="100022" name="TextBox 1"/>
           <p:cNvSpPr/>
           <p:nvPr/>
         </p:nvSpPr>
@@ -606,17 +591,12 @@
         <p:txBody>
           <a:bodyPr xmlns:a="http://schemas.openxmlformats.org/drawingml/2006/main"/>
           <a:lstStyle xmlns:a="http://schemas.openxmlformats.org/drawingml/2006/main"/>
-          <a:p xmlns:a="http://schemas.openxmlformats.org/drawingml/2006/main">
-            <a:r>
-              <a:rPr lang="en-US"/>
-              <a:t/>
-            </a:r>
-          </a:p>
-        </p:txBody>
-      </p:sp>
-      <p:sp>
-        <p:nvSpPr>
-          <p:cNvPr id="10023" name="TextBox 2"/>
+          <a:p xmlns:a="http://schemas.openxmlformats.org/drawingml/2006/main"/>
+        </p:txBody>
+      </p:sp>
+      <p:sp>
+        <p:nvSpPr>
+          <p:cNvPr id="100023" name="TextBox 2"/>
           <p:cNvSpPr txBox="1"/>
           <p:nvPr/>
         </p:nvSpPr>
@@ -674,7 +654,7 @@
       <p:grpSpPr/>
       <p:sp>
         <p:nvSpPr>
-          <p:cNvPr id="10024" name="TextBox 1"/>
+          <p:cNvPr id="100024" name="TextBox 1"/>
           <p:cNvSpPr/>
           <p:nvPr/>
         </p:nvSpPr>
@@ -693,17 +673,12 @@
         <p:txBody>
           <a:bodyPr xmlns:a="http://schemas.openxmlformats.org/drawingml/2006/main"/>
           <a:lstStyle xmlns:a="http://schemas.openxmlformats.org/drawingml/2006/main"/>
-          <a:p xmlns:a="http://schemas.openxmlformats.org/drawingml/2006/main">
-            <a:r>
-              <a:rPr lang="en-US"/>
-              <a:t/>
-            </a:r>
-          </a:p>
-        </p:txBody>
-      </p:sp>
-      <p:sp>
-        <p:nvSpPr>
-          <p:cNvPr id="10025" name="TextBox 2"/>
+          <a:p xmlns:a="http://schemas.openxmlformats.org/drawingml/2006/main"/>
+        </p:txBody>
+      </p:sp>
+      <p:sp>
+        <p:nvSpPr>
+          <p:cNvPr id="100025" name="TextBox 2"/>
           <p:cNvSpPr txBox="1"/>
           <p:nvPr/>
         </p:nvSpPr>
@@ -761,7 +736,7 @@
       <p:grpSpPr/>
       <p:sp>
         <p:nvSpPr>
-          <p:cNvPr id="10026" name="TextBox 1"/>
+          <p:cNvPr id="100026" name="TextBox 1"/>
           <p:cNvSpPr/>
           <p:nvPr/>
         </p:nvSpPr>
@@ -780,17 +755,12 @@
         <p:txBody>
           <a:bodyPr xmlns:a="http://schemas.openxmlformats.org/drawingml/2006/main"/>
           <a:lstStyle xmlns:a="http://schemas.openxmlformats.org/drawingml/2006/main"/>
-          <a:p xmlns:a="http://schemas.openxmlformats.org/drawingml/2006/main">
-            <a:r>
-              <a:rPr lang="en-US"/>
-              <a:t/>
-            </a:r>
-          </a:p>
-        </p:txBody>
-      </p:sp>
-      <p:sp>
-        <p:nvSpPr>
-          <p:cNvPr id="10027" name="TextBox 2"/>
+          <a:p xmlns:a="http://schemas.openxmlformats.org/drawingml/2006/main"/>
+        </p:txBody>
+      </p:sp>
+      <p:sp>
+        <p:nvSpPr>
+          <p:cNvPr id="100027" name="TextBox 2"/>
           <p:cNvSpPr txBox="1"/>
           <p:nvPr/>
         </p:nvSpPr>
@@ -848,7 +818,7 @@
       <p:grpSpPr/>
       <p:sp>
         <p:nvSpPr>
-          <p:cNvPr id="10028" name="TextBox 1"/>
+          <p:cNvPr id="100028" name="TextBox 1"/>
           <p:cNvSpPr/>
           <p:nvPr/>
         </p:nvSpPr>
@@ -867,17 +837,12 @@
         <p:txBody>
           <a:bodyPr xmlns:a="http://schemas.openxmlformats.org/drawingml/2006/main"/>
           <a:lstStyle xmlns:a="http://schemas.openxmlformats.org/drawingml/2006/main"/>
-          <a:p xmlns:a="http://schemas.openxmlformats.org/drawingml/2006/main">
-            <a:r>
-              <a:rPr lang="en-US"/>
-              <a:t/>
-            </a:r>
-          </a:p>
-        </p:txBody>
-      </p:sp>
-      <p:sp>
-        <p:nvSpPr>
-          <p:cNvPr id="10029" name="TextBox 2"/>
+          <a:p xmlns:a="http://schemas.openxmlformats.org/drawingml/2006/main"/>
+        </p:txBody>
+      </p:sp>
+      <p:sp>
+        <p:nvSpPr>
+          <p:cNvPr id="100029" name="TextBox 2"/>
           <p:cNvSpPr txBox="1"/>
           <p:nvPr/>
         </p:nvSpPr>
@@ -935,7 +900,7 @@
       <p:grpSpPr/>
       <p:sp>
         <p:nvSpPr>
-          <p:cNvPr id="10030" name="TextBox 1"/>
+          <p:cNvPr id="100030" name="TextBox 1"/>
           <p:cNvSpPr/>
           <p:nvPr/>
         </p:nvSpPr>
@@ -954,17 +919,12 @@
         <p:txBody>
           <a:bodyPr xmlns:a="http://schemas.openxmlformats.org/drawingml/2006/main"/>
           <a:lstStyle xmlns:a="http://schemas.openxmlformats.org/drawingml/2006/main"/>
-          <a:p xmlns:a="http://schemas.openxmlformats.org/drawingml/2006/main">
-            <a:r>
-              <a:rPr lang="en-US"/>
-              <a:t/>
-            </a:r>
-          </a:p>
-        </p:txBody>
-      </p:sp>
-      <p:sp>
-        <p:nvSpPr>
-          <p:cNvPr id="10031" name="TextBox 2"/>
+          <a:p xmlns:a="http://schemas.openxmlformats.org/drawingml/2006/main"/>
+        </p:txBody>
+      </p:sp>
+      <p:sp>
+        <p:nvSpPr>
+          <p:cNvPr id="100031" name="TextBox 2"/>
           <p:cNvSpPr txBox="1"/>
           <p:nvPr/>
         </p:nvSpPr>
@@ -1022,7 +982,7 @@
       <p:grpSpPr/>
       <p:sp>
         <p:nvSpPr>
-          <p:cNvPr id="10032" name="TextBox 1"/>
+          <p:cNvPr id="100032" name="TextBox 1"/>
           <p:cNvSpPr/>
           <p:nvPr/>
         </p:nvSpPr>
@@ -1041,17 +1001,12 @@
         <p:txBody>
           <a:bodyPr xmlns:a="http://schemas.openxmlformats.org/drawingml/2006/main"/>
           <a:lstStyle xmlns:a="http://schemas.openxmlformats.org/drawingml/2006/main"/>
-          <a:p xmlns:a="http://schemas.openxmlformats.org/drawingml/2006/main">
-            <a:r>
-              <a:rPr lang="en-US"/>
-              <a:t/>
-            </a:r>
-          </a:p>
-        </p:txBody>
-      </p:sp>
-      <p:sp>
-        <p:nvSpPr>
-          <p:cNvPr id="10033" name="TextBox 2"/>
+          <a:p xmlns:a="http://schemas.openxmlformats.org/drawingml/2006/main"/>
+        </p:txBody>
+      </p:sp>
+      <p:sp>
+        <p:nvSpPr>
+          <p:cNvPr id="100033" name="TextBox 2"/>
           <p:cNvSpPr txBox="1"/>
           <p:nvPr/>
         </p:nvSpPr>
@@ -1109,7 +1064,7 @@
       <p:grpSpPr/>
       <p:sp>
         <p:nvSpPr>
-          <p:cNvPr id="10034" name="TextBox 1"/>
+          <p:cNvPr id="100034" name="TextBox 1"/>
           <p:cNvSpPr/>
           <p:nvPr/>
         </p:nvSpPr>
@@ -1128,17 +1083,12 @@
         <p:txBody>
           <a:bodyPr xmlns:a="http://schemas.openxmlformats.org/drawingml/2006/main"/>
           <a:lstStyle xmlns:a="http://schemas.openxmlformats.org/drawingml/2006/main"/>
-          <a:p xmlns:a="http://schemas.openxmlformats.org/drawingml/2006/main">
-            <a:r>
-              <a:rPr lang="en-US"/>
-              <a:t/>
-            </a:r>
-          </a:p>
-        </p:txBody>
-      </p:sp>
-      <p:sp>
-        <p:nvSpPr>
-          <p:cNvPr id="10035" name="TextBox 2"/>
+          <a:p xmlns:a="http://schemas.openxmlformats.org/drawingml/2006/main"/>
+        </p:txBody>
+      </p:sp>
+      <p:sp>
+        <p:nvSpPr>
+          <p:cNvPr id="100035" name="TextBox 2"/>
           <p:cNvSpPr txBox="1"/>
           <p:nvPr/>
         </p:nvSpPr>
@@ -1196,7 +1146,7 @@
       <p:grpSpPr/>
       <p:sp>
         <p:nvSpPr>
-          <p:cNvPr id="10036" name="TextBox 1"/>
+          <p:cNvPr id="100036" name="TextBox 1"/>
           <p:cNvSpPr/>
           <p:nvPr/>
         </p:nvSpPr>
@@ -1215,17 +1165,12 @@
         <p:txBody>
           <a:bodyPr xmlns:a="http://schemas.openxmlformats.org/drawingml/2006/main"/>
           <a:lstStyle xmlns:a="http://schemas.openxmlformats.org/drawingml/2006/main"/>
-          <a:p xmlns:a="http://schemas.openxmlformats.org/drawingml/2006/main">
-            <a:r>
-              <a:rPr lang="en-US"/>
-              <a:t/>
-            </a:r>
-          </a:p>
-        </p:txBody>
-      </p:sp>
-      <p:sp>
-        <p:nvSpPr>
-          <p:cNvPr id="10037" name="TextBox 2"/>
+          <a:p xmlns:a="http://schemas.openxmlformats.org/drawingml/2006/main"/>
+        </p:txBody>
+      </p:sp>
+      <p:sp>
+        <p:nvSpPr>
+          <p:cNvPr id="100037" name="TextBox 2"/>
           <p:cNvSpPr txBox="1"/>
           <p:nvPr/>
         </p:nvSpPr>
@@ -1283,7 +1228,7 @@
       <p:grpSpPr/>
       <p:sp>
         <p:nvSpPr>
-          <p:cNvPr id="10002" name="TextBox 1"/>
+          <p:cNvPr id="100002" name="TextBox 1"/>
           <p:cNvSpPr/>
           <p:nvPr/>
         </p:nvSpPr>
@@ -1302,17 +1247,12 @@
         <p:txBody>
           <a:bodyPr xmlns:a="http://schemas.openxmlformats.org/drawingml/2006/main"/>
           <a:lstStyle xmlns:a="http://schemas.openxmlformats.org/drawingml/2006/main"/>
-          <a:p xmlns:a="http://schemas.openxmlformats.org/drawingml/2006/main">
-            <a:r>
-              <a:rPr lang="en-US"/>
-              <a:t/>
-            </a:r>
-          </a:p>
-        </p:txBody>
-      </p:sp>
-      <p:sp>
-        <p:nvSpPr>
-          <p:cNvPr id="10003" name="TextBox 2"/>
+          <a:p xmlns:a="http://schemas.openxmlformats.org/drawingml/2006/main"/>
+        </p:txBody>
+      </p:sp>
+      <p:sp>
+        <p:nvSpPr>
+          <p:cNvPr id="100003" name="TextBox 2"/>
           <p:cNvSpPr txBox="1"/>
           <p:nvPr/>
         </p:nvSpPr>
@@ -1370,7 +1310,7 @@
       <p:grpSpPr/>
       <p:sp>
         <p:nvSpPr>
-          <p:cNvPr id="10038" name="TextBox 1"/>
+          <p:cNvPr id="100038" name="TextBox 1"/>
           <p:cNvSpPr/>
           <p:nvPr/>
         </p:nvSpPr>
@@ -1389,17 +1329,12 @@
         <p:txBody>
           <a:bodyPr xmlns:a="http://schemas.openxmlformats.org/drawingml/2006/main"/>
           <a:lstStyle xmlns:a="http://schemas.openxmlformats.org/drawingml/2006/main"/>
-          <a:p xmlns:a="http://schemas.openxmlformats.org/drawingml/2006/main">
-            <a:r>
-              <a:rPr lang="en-US"/>
-              <a:t/>
-            </a:r>
-          </a:p>
-        </p:txBody>
-      </p:sp>
-      <p:sp>
-        <p:nvSpPr>
-          <p:cNvPr id="10039" name="TextBox 2"/>
+          <a:p xmlns:a="http://schemas.openxmlformats.org/drawingml/2006/main"/>
+        </p:txBody>
+      </p:sp>
+      <p:sp>
+        <p:nvSpPr>
+          <p:cNvPr id="100039" name="TextBox 2"/>
           <p:cNvSpPr txBox="1"/>
           <p:nvPr/>
         </p:nvSpPr>
@@ -1457,7 +1392,7 @@
       <p:grpSpPr/>
       <p:sp>
         <p:nvSpPr>
-          <p:cNvPr id="10040" name="TextBox 1"/>
+          <p:cNvPr id="100040" name="TextBox 1"/>
           <p:cNvSpPr/>
           <p:nvPr/>
         </p:nvSpPr>
@@ -1476,17 +1411,12 @@
         <p:txBody>
           <a:bodyPr xmlns:a="http://schemas.openxmlformats.org/drawingml/2006/main"/>
           <a:lstStyle xmlns:a="http://schemas.openxmlformats.org/drawingml/2006/main"/>
-          <a:p xmlns:a="http://schemas.openxmlformats.org/drawingml/2006/main">
-            <a:r>
-              <a:rPr lang="en-US"/>
-              <a:t/>
-            </a:r>
-          </a:p>
-        </p:txBody>
-      </p:sp>
-      <p:sp>
-        <p:nvSpPr>
-          <p:cNvPr id="10041" name="TextBox 2"/>
+          <a:p xmlns:a="http://schemas.openxmlformats.org/drawingml/2006/main"/>
+        </p:txBody>
+      </p:sp>
+      <p:sp>
+        <p:nvSpPr>
+          <p:cNvPr id="100041" name="TextBox 2"/>
           <p:cNvSpPr txBox="1"/>
           <p:nvPr/>
         </p:nvSpPr>
@@ -1544,7 +1474,7 @@
       <p:grpSpPr/>
       <p:sp>
         <p:nvSpPr>
-          <p:cNvPr id="10042" name="TextBox 1"/>
+          <p:cNvPr id="100042" name="TextBox 1"/>
           <p:cNvSpPr/>
           <p:nvPr/>
         </p:nvSpPr>
@@ -1563,17 +1493,12 @@
         <p:txBody>
           <a:bodyPr xmlns:a="http://schemas.openxmlformats.org/drawingml/2006/main"/>
           <a:lstStyle xmlns:a="http://schemas.openxmlformats.org/drawingml/2006/main"/>
-          <a:p xmlns:a="http://schemas.openxmlformats.org/drawingml/2006/main">
-            <a:r>
-              <a:rPr lang="en-US"/>
-              <a:t/>
-            </a:r>
-          </a:p>
-        </p:txBody>
-      </p:sp>
-      <p:sp>
-        <p:nvSpPr>
-          <p:cNvPr id="10043" name="TextBox 2"/>
+          <a:p xmlns:a="http://schemas.openxmlformats.org/drawingml/2006/main"/>
+        </p:txBody>
+      </p:sp>
+      <p:sp>
+        <p:nvSpPr>
+          <p:cNvPr id="100043" name="TextBox 2"/>
           <p:cNvSpPr txBox="1"/>
           <p:nvPr/>
         </p:nvSpPr>
@@ -1631,7 +1556,7 @@
       <p:grpSpPr/>
       <p:sp>
         <p:nvSpPr>
-          <p:cNvPr id="10044" name="TextBox 1"/>
+          <p:cNvPr id="100044" name="TextBox 1"/>
           <p:cNvSpPr/>
           <p:nvPr/>
         </p:nvSpPr>
@@ -1650,17 +1575,12 @@
         <p:txBody>
           <a:bodyPr xmlns:a="http://schemas.openxmlformats.org/drawingml/2006/main"/>
           <a:lstStyle xmlns:a="http://schemas.openxmlformats.org/drawingml/2006/main"/>
-          <a:p xmlns:a="http://schemas.openxmlformats.org/drawingml/2006/main">
-            <a:r>
-              <a:rPr lang="en-US"/>
-              <a:t/>
-            </a:r>
-          </a:p>
-        </p:txBody>
-      </p:sp>
-      <p:sp>
-        <p:nvSpPr>
-          <p:cNvPr id="10045" name="TextBox 2"/>
+          <a:p xmlns:a="http://schemas.openxmlformats.org/drawingml/2006/main"/>
+        </p:txBody>
+      </p:sp>
+      <p:sp>
+        <p:nvSpPr>
+          <p:cNvPr id="100045" name="TextBox 2"/>
           <p:cNvSpPr txBox="1"/>
           <p:nvPr/>
         </p:nvSpPr>
@@ -1718,7 +1638,7 @@
       <p:grpSpPr/>
       <p:sp>
         <p:nvSpPr>
-          <p:cNvPr id="10046" name="TextBox 1"/>
+          <p:cNvPr id="100046" name="TextBox 1"/>
           <p:cNvSpPr/>
           <p:nvPr/>
         </p:nvSpPr>
@@ -1737,17 +1657,12 @@
         <p:txBody>
           <a:bodyPr xmlns:a="http://schemas.openxmlformats.org/drawingml/2006/main"/>
           <a:lstStyle xmlns:a="http://schemas.openxmlformats.org/drawingml/2006/main"/>
-          <a:p xmlns:a="http://schemas.openxmlformats.org/drawingml/2006/main">
-            <a:r>
-              <a:rPr lang="en-US"/>
-              <a:t/>
-            </a:r>
-          </a:p>
-        </p:txBody>
-      </p:sp>
-      <p:sp>
-        <p:nvSpPr>
-          <p:cNvPr id="10047" name="TextBox 2"/>
+          <a:p xmlns:a="http://schemas.openxmlformats.org/drawingml/2006/main"/>
+        </p:txBody>
+      </p:sp>
+      <p:sp>
+        <p:nvSpPr>
+          <p:cNvPr id="100047" name="TextBox 2"/>
           <p:cNvSpPr txBox="1"/>
           <p:nvPr/>
         </p:nvSpPr>
@@ -1805,7 +1720,7 @@
       <p:grpSpPr/>
       <p:sp>
         <p:nvSpPr>
-          <p:cNvPr id="10048" name="TextBox 1"/>
+          <p:cNvPr id="100048" name="TextBox 1"/>
           <p:cNvSpPr/>
           <p:nvPr/>
         </p:nvSpPr>
@@ -1824,17 +1739,12 @@
         <p:txBody>
           <a:bodyPr xmlns:a="http://schemas.openxmlformats.org/drawingml/2006/main"/>
           <a:lstStyle xmlns:a="http://schemas.openxmlformats.org/drawingml/2006/main"/>
-          <a:p xmlns:a="http://schemas.openxmlformats.org/drawingml/2006/main">
-            <a:r>
-              <a:rPr lang="en-US"/>
-              <a:t/>
-            </a:r>
-          </a:p>
-        </p:txBody>
-      </p:sp>
-      <p:sp>
-        <p:nvSpPr>
-          <p:cNvPr id="10049" name="TextBox 2"/>
+          <a:p xmlns:a="http://schemas.openxmlformats.org/drawingml/2006/main"/>
+        </p:txBody>
+      </p:sp>
+      <p:sp>
+        <p:nvSpPr>
+          <p:cNvPr id="100049" name="TextBox 2"/>
           <p:cNvSpPr txBox="1"/>
           <p:nvPr/>
         </p:nvSpPr>
@@ -1892,7 +1802,7 @@
       <p:grpSpPr/>
       <p:sp>
         <p:nvSpPr>
-          <p:cNvPr id="10004" name="TextBox 1"/>
+          <p:cNvPr id="100004" name="TextBox 1"/>
           <p:cNvSpPr/>
           <p:nvPr/>
         </p:nvSpPr>
@@ -1911,17 +1821,12 @@
         <p:txBody>
           <a:bodyPr xmlns:a="http://schemas.openxmlformats.org/drawingml/2006/main"/>
           <a:lstStyle xmlns:a="http://schemas.openxmlformats.org/drawingml/2006/main"/>
-          <a:p xmlns:a="http://schemas.openxmlformats.org/drawingml/2006/main">
-            <a:r>
-              <a:rPr lang="en-US"/>
-              <a:t/>
-            </a:r>
-          </a:p>
-        </p:txBody>
-      </p:sp>
-      <p:sp>
-        <p:nvSpPr>
-          <p:cNvPr id="10005" name="TextBox 2"/>
+          <a:p xmlns:a="http://schemas.openxmlformats.org/drawingml/2006/main"/>
+        </p:txBody>
+      </p:sp>
+      <p:sp>
+        <p:nvSpPr>
+          <p:cNvPr id="100005" name="TextBox 2"/>
           <p:cNvSpPr txBox="1"/>
           <p:nvPr/>
         </p:nvSpPr>
@@ -1979,7 +1884,7 @@
       <p:grpSpPr/>
       <p:sp>
         <p:nvSpPr>
-          <p:cNvPr id="10006" name="TextBox 1"/>
+          <p:cNvPr id="100006" name="TextBox 1"/>
           <p:cNvSpPr/>
           <p:nvPr/>
         </p:nvSpPr>
@@ -1998,17 +1903,12 @@
         <p:txBody>
           <a:bodyPr xmlns:a="http://schemas.openxmlformats.org/drawingml/2006/main"/>
           <a:lstStyle xmlns:a="http://schemas.openxmlformats.org/drawingml/2006/main"/>
-          <a:p xmlns:a="http://schemas.openxmlformats.org/drawingml/2006/main">
-            <a:r>
-              <a:rPr lang="en-US"/>
-              <a:t/>
-            </a:r>
-          </a:p>
-        </p:txBody>
-      </p:sp>
-      <p:sp>
-        <p:nvSpPr>
-          <p:cNvPr id="10007" name="TextBox 2"/>
+          <a:p xmlns:a="http://schemas.openxmlformats.org/drawingml/2006/main"/>
+        </p:txBody>
+      </p:sp>
+      <p:sp>
+        <p:nvSpPr>
+          <p:cNvPr id="100007" name="TextBox 2"/>
           <p:cNvSpPr txBox="1"/>
           <p:nvPr/>
         </p:nvSpPr>
@@ -2066,7 +1966,7 @@
       <p:grpSpPr/>
       <p:sp>
         <p:nvSpPr>
-          <p:cNvPr id="10008" name="TextBox 1"/>
+          <p:cNvPr id="100008" name="TextBox 1"/>
           <p:cNvSpPr/>
           <p:nvPr/>
         </p:nvSpPr>
@@ -2085,17 +1985,12 @@
         <p:txBody>
           <a:bodyPr xmlns:a="http://schemas.openxmlformats.org/drawingml/2006/main"/>
           <a:lstStyle xmlns:a="http://schemas.openxmlformats.org/drawingml/2006/main"/>
-          <a:p xmlns:a="http://schemas.openxmlformats.org/drawingml/2006/main">
-            <a:r>
-              <a:rPr lang="en-US"/>
-              <a:t/>
-            </a:r>
-          </a:p>
-        </p:txBody>
-      </p:sp>
-      <p:sp>
-        <p:nvSpPr>
-          <p:cNvPr id="10009" name="TextBox 2"/>
+          <a:p xmlns:a="http://schemas.openxmlformats.org/drawingml/2006/main"/>
+        </p:txBody>
+      </p:sp>
+      <p:sp>
+        <p:nvSpPr>
+          <p:cNvPr id="100009" name="TextBox 2"/>
           <p:cNvSpPr txBox="1"/>
           <p:nvPr/>
         </p:nvSpPr>
@@ -2153,7 +2048,7 @@
       <p:grpSpPr/>
       <p:sp>
         <p:nvSpPr>
-          <p:cNvPr id="10010" name="TextBox 1"/>
+          <p:cNvPr id="100010" name="TextBox 1"/>
           <p:cNvSpPr/>
           <p:nvPr/>
         </p:nvSpPr>
@@ -2172,17 +2067,12 @@
         <p:txBody>
           <a:bodyPr xmlns:a="http://schemas.openxmlformats.org/drawingml/2006/main"/>
           <a:lstStyle xmlns:a="http://schemas.openxmlformats.org/drawingml/2006/main"/>
-          <a:p xmlns:a="http://schemas.openxmlformats.org/drawingml/2006/main">
-            <a:r>
-              <a:rPr lang="en-US"/>
-              <a:t/>
-            </a:r>
-          </a:p>
-        </p:txBody>
-      </p:sp>
-      <p:sp>
-        <p:nvSpPr>
-          <p:cNvPr id="10011" name="TextBox 2"/>
+          <a:p xmlns:a="http://schemas.openxmlformats.org/drawingml/2006/main"/>
+        </p:txBody>
+      </p:sp>
+      <p:sp>
+        <p:nvSpPr>
+          <p:cNvPr id="100011" name="TextBox 2"/>
           <p:cNvSpPr txBox="1"/>
           <p:nvPr/>
         </p:nvSpPr>
@@ -2240,7 +2130,7 @@
       <p:grpSpPr/>
       <p:sp>
         <p:nvSpPr>
-          <p:cNvPr id="10012" name="TextBox 1"/>
+          <p:cNvPr id="100012" name="TextBox 1"/>
           <p:cNvSpPr/>
           <p:nvPr/>
         </p:nvSpPr>
@@ -2259,17 +2149,12 @@
         <p:txBody>
           <a:bodyPr xmlns:a="http://schemas.openxmlformats.org/drawingml/2006/main"/>
           <a:lstStyle xmlns:a="http://schemas.openxmlformats.org/drawingml/2006/main"/>
-          <a:p xmlns:a="http://schemas.openxmlformats.org/drawingml/2006/main">
-            <a:r>
-              <a:rPr lang="en-US"/>
-              <a:t/>
-            </a:r>
-          </a:p>
-        </p:txBody>
-      </p:sp>
-      <p:sp>
-        <p:nvSpPr>
-          <p:cNvPr id="10013" name="TextBox 2"/>
+          <a:p xmlns:a="http://schemas.openxmlformats.org/drawingml/2006/main"/>
+        </p:txBody>
+      </p:sp>
+      <p:sp>
+        <p:nvSpPr>
+          <p:cNvPr id="100013" name="TextBox 2"/>
           <p:cNvSpPr txBox="1"/>
           <p:nvPr/>
         </p:nvSpPr>
@@ -2327,7 +2212,7 @@
       <p:grpSpPr/>
       <p:sp>
         <p:nvSpPr>
-          <p:cNvPr id="10014" name="TextBox 1"/>
+          <p:cNvPr id="100014" name="TextBox 1"/>
           <p:cNvSpPr/>
           <p:nvPr/>
         </p:nvSpPr>
@@ -2346,17 +2231,12 @@
         <p:txBody>
           <a:bodyPr xmlns:a="http://schemas.openxmlformats.org/drawingml/2006/main"/>
           <a:lstStyle xmlns:a="http://schemas.openxmlformats.org/drawingml/2006/main"/>
-          <a:p xmlns:a="http://schemas.openxmlformats.org/drawingml/2006/main">
-            <a:r>
-              <a:rPr lang="en-US"/>
-              <a:t/>
-            </a:r>
-          </a:p>
-        </p:txBody>
-      </p:sp>
-      <p:sp>
-        <p:nvSpPr>
-          <p:cNvPr id="10015" name="TextBox 2"/>
+          <a:p xmlns:a="http://schemas.openxmlformats.org/drawingml/2006/main"/>
+        </p:txBody>
+      </p:sp>
+      <p:sp>
+        <p:nvSpPr>
+          <p:cNvPr id="100015" name="TextBox 2"/>
           <p:cNvSpPr txBox="1"/>
           <p:nvPr/>
         </p:nvSpPr>
@@ -2414,7 +2294,7 @@
       <p:grpSpPr/>
       <p:sp>
         <p:nvSpPr>
-          <p:cNvPr id="10016" name="TextBox 1"/>
+          <p:cNvPr id="100016" name="TextBox 1"/>
           <p:cNvSpPr/>
           <p:nvPr/>
         </p:nvSpPr>
@@ -2433,17 +2313,12 @@
         <p:txBody>
           <a:bodyPr xmlns:a="http://schemas.openxmlformats.org/drawingml/2006/main"/>
           <a:lstStyle xmlns:a="http://schemas.openxmlformats.org/drawingml/2006/main"/>
-          <a:p xmlns:a="http://schemas.openxmlformats.org/drawingml/2006/main">
-            <a:r>
-              <a:rPr lang="en-US"/>
-              <a:t/>
-            </a:r>
-          </a:p>
-        </p:txBody>
-      </p:sp>
-      <p:sp>
-        <p:nvSpPr>
-          <p:cNvPr id="10017" name="TextBox 2"/>
+          <a:p xmlns:a="http://schemas.openxmlformats.org/drawingml/2006/main"/>
+        </p:txBody>
+      </p:sp>
+      <p:sp>
+        <p:nvSpPr>
+          <p:cNvPr id="100017" name="TextBox 2"/>
           <p:cNvSpPr txBox="1"/>
           <p:nvPr/>
         </p:nvSpPr>
